--- a/public/fun/pack/pptx/talkpro/발표템플릿프리미엄_50_연말결산·회고_골든레드.pptx
+++ b/public/fun/pack/pptx/talkpro/발표템플릿프리미엄_50_연말결산·회고_골든레드.pptx
@@ -115,12 +115,12 @@
   <p:extLst>
     <p:ext uri="{521415D9-36F7-43E2-AB2F-B90AF26B5E84}">
       <p14:sectionLst xmlns:p14="http://schemas.microsoft.com/office/powerpoint/2010/main">
-        <p14:section name="시작" id="{A6F5A654-8D47-4E2D-9ACC-E4CF1D1E0311}">
+        <p14:section name="시작" id="{5381956D-AA8F-4B7C-AA3D-8F82FD670576}">
           <p14:sldIdLst>
             <p14:sldId id="256"/>
           </p14:sldIdLst>
         </p14:section>
-        <p14:section name="본문" id="{839E50C2-4FA1-4089-8E47-355BBF29C67A}">
+        <p14:section name="본문" id="{094FCDD8-4711-4746-8BB0-080098E6686D}">
           <p14:sldIdLst>
             <p14:sldId id="257"/>
             <p14:sldId id="258"/>
@@ -131,7 +131,7 @@
             <p14:sldId id="263"/>
           </p14:sldIdLst>
         </p14:section>
-        <p14:section name="마무리" id="{A714155B-B16A-4221-904A-F8A337E3C095}">
+        <p14:section name="마무리" id="{F15D3312-81E7-4000-A6DE-1FBC1678BBAD}">
           <p14:sldIdLst>
             <p14:sldId id="264"/>
           </p14:sldIdLst>
@@ -1928,7 +1928,7 @@
             </a:lvl1pPr>
           </a:lstStyle>
           <a:p>
-            <a:fld id="{8936064D-8211-406A-926E-45C741A65225}" type="slidenum">
+            <a:fld id="{D429DD8A-7827-4028-99B2-24EE7B384203}" type="slidenum">
               <a:rPr lang="en-US"/>
               <a:t>‹#›</a:t>
             </a:fld>
@@ -2644,7 +2644,7 @@
             </a:lvl1pPr>
           </a:lstStyle>
           <a:p>
-            <a:fld id="{C634CEDF-5D00-4A54-91BD-BB6E02DF50FD}" type="slidenum">
+            <a:fld id="{2E0719B1-058B-4F66-8A2F-B2625A018822}" type="slidenum">
               <a:rPr lang="en-US"/>
               <a:t>‹#›</a:t>
             </a:fld>
@@ -3336,7 +3336,7 @@
             </a:lvl1pPr>
           </a:lstStyle>
           <a:p>
-            <a:fld id="{CA04131A-E0A7-4230-8186-97974DF51F4C}" type="slidenum">
+            <a:fld id="{046493A0-BA00-49A9-B68E-336B25E73ADB}" type="slidenum">
               <a:rPr lang="en-US"/>
               <a:t>‹#›</a:t>
             </a:fld>
@@ -4181,7 +4181,7 @@
           <a:p>
             <a:r>
               <a:rPr lang="ko-KR"/>
-              <a:t>내년에 가져갈 것과 두고 갈 것을 나눴습니다</a:t>
+              <a:t>앞으로 가져갈 것과 두고 갈 것을 나눴습니다</a:t>
             </a:r>
           </a:p>
         </p:txBody>
@@ -4209,7 +4209,7 @@
           <a:p>
             <a:r>
               <a:rPr lang="ko-KR"/>
-              <a:t>0000. 00. 00</a:t>
+              <a:t>날짜 입력</a:t>
             </a:r>
           </a:p>
         </p:txBody>
@@ -4294,7 +4294,7 @@
           <a:bodyPr/>
           <a:lstStyle/>
           <a:p>
-            <a:fld id="{3D6C8344-B8EF-4417-BF6D-400E421DE0A1}" type="slidenum">
+            <a:fld id="{3D19A726-D4C8-43DB-9FBD-72B7874609F5}" type="slidenum">
               <a:rPr lang="en-US"/>
               <a:t>‹#›</a:t>
             </a:fld>
@@ -5396,7 +5396,7 @@
           <a:bodyPr/>
           <a:lstStyle/>
           <a:p>
-            <a:fld id="{871E365F-13CC-404D-8CDE-CE4F1719177C}" type="slidenum">
+            <a:fld id="{57B3B69A-9DBD-4950-8D87-D37E7E4BB4CF}" type="slidenum">
               <a:rPr lang="en-US"/>
               <a:t>‹#›</a:t>
             </a:fld>
@@ -5484,7 +5484,7 @@
           <a:bodyPr/>
           <a:lstStyle/>
           <a:p>
-            <a:fld id="{531D72CF-F277-4C2B-BF81-23F76D9DF866}" type="slidenum">
+            <a:fld id="{0240F4AB-262D-4130-885A-1CDC748DD3E4}" type="slidenum">
               <a:rPr lang="en-US"/>
               <a:t>‹#›</a:t>
             </a:fld>
@@ -6382,7 +6382,7 @@
           <a:bodyPr/>
           <a:lstStyle/>
           <a:p>
-            <a:fld id="{568F01C9-D90D-4301-8074-C57C34C43084}" type="slidenum">
+            <a:fld id="{4F700005-801F-4D97-998F-DEB90425B48D}" type="slidenum">
               <a:rPr lang="en-US"/>
               <a:t>‹#›</a:t>
             </a:fld>
@@ -6986,7 +6986,7 @@
           <a:bodyPr/>
           <a:lstStyle/>
           <a:p>
-            <a:fld id="{7C0C1246-D1B9-4BDA-9462-2D4B2834CBB5}" type="slidenum">
+            <a:fld id="{5347500A-4609-44A9-8719-104C8128D83D}" type="slidenum">
               <a:rPr lang="en-US"/>
               <a:t>‹#›</a:t>
             </a:fld>
@@ -7166,7 +7166,7 @@
           <a:bodyPr/>
           <a:lstStyle/>
           <a:p>
-            <a:fld id="{8BA7E8F5-F763-450A-9281-88F80D369B3C}" type="slidenum">
+            <a:fld id="{CEA388C1-D7A6-4B8E-A37E-C617C1E3AA8D}" type="slidenum">
               <a:rPr lang="en-US"/>
               <a:t>‹#›</a:t>
             </a:fld>
@@ -8230,7 +8230,7 @@
           <a:bodyPr/>
           <a:lstStyle/>
           <a:p>
-            <a:fld id="{0FFA58EA-F135-4901-ADE7-58E9AA020C0E}" type="slidenum">
+            <a:fld id="{D88E6E29-B2DD-4579-8EC1-91BA82CAFEF9}" type="slidenum">
               <a:rPr lang="en-US"/>
               <a:t>‹#›</a:t>
             </a:fld>
